--- a/payroll_ppt/payroll.ppt.pptx
+++ b/payroll_ppt/payroll.ppt.pptx
@@ -649,7 +649,7 @@
           <a:p>
             <a:fld id="{5BCAD085-E8A6-8845-BD4E-CB4CCA059FC4}" type="datetimeFigureOut">
               <a:rPr lang="en-US" smtClean="0"/>
-              <a:t>4/12/2026</a:t>
+              <a:t>4/13/2026</a:t>
             </a:fld>
             <a:endParaRPr lang="en-US"/>
           </a:p>
@@ -750,7 +750,7 @@
           </a:ln>
           <a:extLst>
             <a:ext uri="{91240B29-F687-4f45-9708-019B960494DF}">
-              <a14:hiddenLine xmlns="" xmlns:a14="http://schemas.microsoft.com/office/drawing/2010/main" w="9525">
+              <a14:hiddenLine xmlns:a14="http://schemas.microsoft.com/office/drawing/2010/main" xmlns="" w="9525">
                 <a:solidFill>
                   <a:srgbClr val="000000"/>
                 </a:solidFill>
@@ -805,7 +805,7 @@
           </a:ln>
           <a:extLst>
             <a:ext uri="{91240B29-F687-4f45-9708-019B960494DF}">
-              <a14:hiddenLine xmlns="" xmlns:a14="http://schemas.microsoft.com/office/drawing/2010/main" w="9525">
+              <a14:hiddenLine xmlns:a14="http://schemas.microsoft.com/office/drawing/2010/main" xmlns="" w="9525">
                 <a:solidFill>
                   <a:srgbClr val="000000"/>
                 </a:solidFill>
@@ -1060,7 +1060,7 @@
           <a:p>
             <a:fld id="{5BCAD085-E8A6-8845-BD4E-CB4CCA059FC4}" type="datetimeFigureOut">
               <a:rPr lang="en-US" smtClean="0"/>
-              <a:t>4/12/2026</a:t>
+              <a:t>4/13/2026</a:t>
             </a:fld>
             <a:endParaRPr lang="en-US"/>
           </a:p>
@@ -1308,7 +1308,7 @@
           <a:p>
             <a:fld id="{5BCAD085-E8A6-8845-BD4E-CB4CCA059FC4}" type="datetimeFigureOut">
               <a:rPr lang="en-US" smtClean="0"/>
-              <a:t>4/12/2026</a:t>
+              <a:t>4/13/2026</a:t>
             </a:fld>
             <a:endParaRPr lang="en-US"/>
           </a:p>
@@ -1848,7 +1848,7 @@
           <a:p>
             <a:fld id="{5BCAD085-E8A6-8845-BD4E-CB4CCA059FC4}" type="datetimeFigureOut">
               <a:rPr lang="en-US" smtClean="0"/>
-              <a:t>4/12/2026</a:t>
+              <a:t>4/13/2026</a:t>
             </a:fld>
             <a:endParaRPr lang="en-US"/>
           </a:p>
@@ -2096,7 +2096,7 @@
           <a:p>
             <a:fld id="{5BCAD085-E8A6-8845-BD4E-CB4CCA059FC4}" type="datetimeFigureOut">
               <a:rPr lang="en-US" smtClean="0"/>
-              <a:t>4/12/2026</a:t>
+              <a:t>4/13/2026</a:t>
             </a:fld>
             <a:endParaRPr lang="en-US"/>
           </a:p>
@@ -2628,7 +2628,7 @@
           <a:p>
             <a:fld id="{5BCAD085-E8A6-8845-BD4E-CB4CCA059FC4}" type="datetimeFigureOut">
               <a:rPr lang="en-US" smtClean="0"/>
-              <a:t>4/12/2026</a:t>
+              <a:t>4/13/2026</a:t>
             </a:fld>
             <a:endParaRPr lang="en-US"/>
           </a:p>
@@ -2925,7 +2925,7 @@
           <a:p>
             <a:fld id="{5BCAD085-E8A6-8845-BD4E-CB4CCA059FC4}" type="datetimeFigureOut">
               <a:rPr lang="en-US" smtClean="0"/>
-              <a:t>4/12/2026</a:t>
+              <a:t>4/13/2026</a:t>
             </a:fld>
             <a:endParaRPr lang="en-US"/>
           </a:p>
@@ -3099,7 +3099,7 @@
           <a:p>
             <a:fld id="{5BCAD085-E8A6-8845-BD4E-CB4CCA059FC4}" type="datetimeFigureOut">
               <a:rPr lang="en-US" smtClean="0"/>
-              <a:t>4/12/2026</a:t>
+              <a:t>4/13/2026</a:t>
             </a:fld>
             <a:endParaRPr lang="en-US"/>
           </a:p>
@@ -3279,7 +3279,7 @@
           <a:p>
             <a:fld id="{5BCAD085-E8A6-8845-BD4E-CB4CCA059FC4}" type="datetimeFigureOut">
               <a:rPr lang="en-US" smtClean="0"/>
-              <a:t>4/12/2026</a:t>
+              <a:t>4/13/2026</a:t>
             </a:fld>
             <a:endParaRPr lang="en-US"/>
           </a:p>
@@ -3464,7 +3464,7 @@
           <a:p>
             <a:fld id="{5BCAD085-E8A6-8845-BD4E-CB4CCA059FC4}" type="datetimeFigureOut">
               <a:rPr lang="en-US" smtClean="0"/>
-              <a:t>4/12/2026</a:t>
+              <a:t>4/13/2026</a:t>
             </a:fld>
             <a:endParaRPr lang="en-US"/>
           </a:p>
@@ -3720,7 +3720,7 @@
           <a:p>
             <a:fld id="{5BCAD085-E8A6-8845-BD4E-CB4CCA059FC4}" type="datetimeFigureOut">
               <a:rPr lang="en-US" smtClean="0"/>
-              <a:t>4/12/2026</a:t>
+              <a:t>4/13/2026</a:t>
             </a:fld>
             <a:endParaRPr lang="en-US"/>
           </a:p>
@@ -4022,7 +4022,7 @@
           <a:p>
             <a:fld id="{5BCAD085-E8A6-8845-BD4E-CB4CCA059FC4}" type="datetimeFigureOut">
               <a:rPr lang="en-US" smtClean="0"/>
-              <a:t>4/12/2026</a:t>
+              <a:t>4/13/2026</a:t>
             </a:fld>
             <a:endParaRPr lang="en-US"/>
           </a:p>
@@ -4464,7 +4464,7 @@
           <a:p>
             <a:fld id="{5BCAD085-E8A6-8845-BD4E-CB4CCA059FC4}" type="datetimeFigureOut">
               <a:rPr lang="en-US" smtClean="0"/>
-              <a:t>4/12/2026</a:t>
+              <a:t>4/13/2026</a:t>
             </a:fld>
             <a:endParaRPr lang="en-US"/>
           </a:p>
@@ -4582,7 +4582,7 @@
           <a:p>
             <a:fld id="{5BCAD085-E8A6-8845-BD4E-CB4CCA059FC4}" type="datetimeFigureOut">
               <a:rPr lang="en-US" smtClean="0"/>
-              <a:t>4/12/2026</a:t>
+              <a:t>4/13/2026</a:t>
             </a:fld>
             <a:endParaRPr lang="en-US"/>
           </a:p>
@@ -4677,7 +4677,7 @@
           <a:p>
             <a:fld id="{5BCAD085-E8A6-8845-BD4E-CB4CCA059FC4}" type="datetimeFigureOut">
               <a:rPr lang="en-US" smtClean="0"/>
-              <a:t>4/12/2026</a:t>
+              <a:t>4/13/2026</a:t>
             </a:fld>
             <a:endParaRPr lang="en-US"/>
           </a:p>
@@ -4960,7 +4960,7 @@
           <a:p>
             <a:fld id="{5BCAD085-E8A6-8845-BD4E-CB4CCA059FC4}" type="datetimeFigureOut">
               <a:rPr lang="en-US" smtClean="0"/>
-              <a:t>4/12/2026</a:t>
+              <a:t>4/13/2026</a:t>
             </a:fld>
             <a:endParaRPr lang="en-US"/>
           </a:p>
@@ -5251,7 +5251,7 @@
           <a:p>
             <a:fld id="{5BCAD085-E8A6-8845-BD4E-CB4CCA059FC4}" type="datetimeFigureOut">
               <a:rPr lang="en-US" smtClean="0"/>
-              <a:t>4/12/2026</a:t>
+              <a:t>4/13/2026</a:t>
             </a:fld>
             <a:endParaRPr lang="en-US"/>
           </a:p>
@@ -5775,7 +5775,7 @@
           <a:p>
             <a:fld id="{5BCAD085-E8A6-8845-BD4E-CB4CCA059FC4}" type="datetimeFigureOut">
               <a:rPr lang="en-US" smtClean="0"/>
-              <a:t>4/12/2026</a:t>
+              <a:t>4/13/2026</a:t>
             </a:fld>
             <a:endParaRPr lang="en-US"/>
           </a:p>
